--- a/documentation/MarketingMaterial/CAMARA Onepager.pptx
+++ b/documentation/MarketingMaterial/CAMARA Onepager.pptx
@@ -252,7 +252,7 @@
 <file path=ppt/revisionInfo.xml><?xml version="1.0" encoding="utf-8"?>
 <p1510:revInfo xmlns:a="http://schemas.openxmlformats.org/drawingml/2006/main" xmlns:r="http://schemas.openxmlformats.org/officeDocument/2006/relationships" xmlns:p1510="http://schemas.microsoft.com/office/powerpoint/2015/10/main">
   <p1510:revLst>
-    <p1510:client id="{6055671A-50BB-43B1-8535-2336391658ED}" v="1" dt="2025-01-24T09:23:40.808"/>
+    <p1510:client id="{554DEC17-E8D2-4F38-A28A-51E6DB201773}" v="1" dt="2025-02-22T14:50:35.085"/>
   </p1510:revLst>
 </p1510:revInfo>
 </file>
@@ -556,6 +556,54 @@
     </pc:docChg>
   </pc:docChgLst>
   <pc:docChgLst>
+    <pc:chgData name="Kümmerle, Markus" userId="edb588ad-b118-44cb-93b6-335b967c9009" providerId="ADAL" clId="{554DEC17-E8D2-4F38-A28A-51E6DB201773}"/>
+    <pc:docChg chg="custSel modSld">
+      <pc:chgData name="Kümmerle, Markus" userId="edb588ad-b118-44cb-93b6-335b967c9009" providerId="ADAL" clId="{554DEC17-E8D2-4F38-A28A-51E6DB201773}" dt="2025-02-22T14:51:24.388" v="15" actId="1076"/>
+      <pc:docMkLst>
+        <pc:docMk/>
+      </pc:docMkLst>
+      <pc:sldChg chg="addSp delSp modSp mod">
+        <pc:chgData name="Kümmerle, Markus" userId="edb588ad-b118-44cb-93b6-335b967c9009" providerId="ADAL" clId="{554DEC17-E8D2-4F38-A28A-51E6DB201773}" dt="2025-02-22T14:51:24.388" v="15" actId="1076"/>
+        <pc:sldMkLst>
+          <pc:docMk/>
+          <pc:sldMk cId="753175953" sldId="2056"/>
+        </pc:sldMkLst>
+        <pc:spChg chg="mod">
+          <ac:chgData name="Kümmerle, Markus" userId="edb588ad-b118-44cb-93b6-335b967c9009" providerId="ADAL" clId="{554DEC17-E8D2-4F38-A28A-51E6DB201773}" dt="2025-02-22T14:46:50.672" v="5" actId="20577"/>
+          <ac:spMkLst>
+            <pc:docMk/>
+            <pc:sldMk cId="753175953" sldId="2056"/>
+            <ac:spMk id="12" creationId="{70463976-1354-BDDA-18A9-EEFA0BB1625A}"/>
+          </ac:spMkLst>
+        </pc:spChg>
+        <pc:picChg chg="add del mod">
+          <ac:chgData name="Kümmerle, Markus" userId="edb588ad-b118-44cb-93b6-335b967c9009" providerId="ADAL" clId="{554DEC17-E8D2-4F38-A28A-51E6DB201773}" dt="2025-02-22T14:51:03.522" v="12" actId="478"/>
+          <ac:picMkLst>
+            <pc:docMk/>
+            <pc:sldMk cId="753175953" sldId="2056"/>
+            <ac:picMk id="2" creationId="{1B28B980-C589-EC84-1FAA-EA3635B4268C}"/>
+          </ac:picMkLst>
+        </pc:picChg>
+        <pc:picChg chg="del">
+          <ac:chgData name="Kümmerle, Markus" userId="edb588ad-b118-44cb-93b6-335b967c9009" providerId="ADAL" clId="{554DEC17-E8D2-4F38-A28A-51E6DB201773}" dt="2025-02-22T14:51:20.249" v="14" actId="478"/>
+          <ac:picMkLst>
+            <pc:docMk/>
+            <pc:sldMk cId="753175953" sldId="2056"/>
+            <ac:picMk id="3" creationId="{F44F88F7-81A7-8F22-8638-21ACDF9A0CB2}"/>
+          </ac:picMkLst>
+        </pc:picChg>
+        <pc:picChg chg="add mod">
+          <ac:chgData name="Kümmerle, Markus" userId="edb588ad-b118-44cb-93b6-335b967c9009" providerId="ADAL" clId="{554DEC17-E8D2-4F38-A28A-51E6DB201773}" dt="2025-02-22T14:51:24.388" v="15" actId="1076"/>
+          <ac:picMkLst>
+            <pc:docMk/>
+            <pc:sldMk cId="753175953" sldId="2056"/>
+            <ac:picMk id="15" creationId="{CA90E277-F6CB-1BFD-13B0-04AC28A8AFC0}"/>
+          </ac:picMkLst>
+        </pc:picChg>
+      </pc:sldChg>
+    </pc:docChg>
+  </pc:docChgLst>
+  <pc:docChgLst>
     <pc:chgData name="Markus Kümmerle" userId="edb588ad-b118-44cb-93b6-335b967c9009" providerId="ADAL" clId="{D2DCF2E7-8E35-44EA-AF39-7F465D266750}"/>
     <pc:docChg chg="custSel modSld">
       <pc:chgData name="Markus Kümmerle" userId="edb588ad-b118-44cb-93b6-335b967c9009" providerId="ADAL" clId="{D2DCF2E7-8E35-44EA-AF39-7F465D266750}" dt="2024-12-17T13:38:41.904" v="14" actId="1076"/>
@@ -681,7 +729,7 @@
             <a:fld id="{9847C1C0-7CF7-4E43-8415-72BC7E37BCB3}" type="datetimeFigureOut">
               <a:rPr lang="de-DE" smtClean="0"/>
               <a:pPr/>
-              <a:t>24.01.2025</a:t>
+              <a:t>22.02.2025</a:t>
             </a:fld>
             <a:endParaRPr lang="de-DE"/>
           </a:p>
@@ -4976,7 +5024,7 @@
         <p:spPr>
           <a:xfrm>
             <a:off x="370278" y="251736"/>
-            <a:ext cx="696024" cy="215444"/>
+            <a:ext cx="707245" cy="215444"/>
           </a:xfrm>
           <a:prstGeom prst="rect">
             <a:avLst/>
@@ -4993,7 +5041,7 @@
               <a:rPr lang="de-DE" sz="800" dirty="0">
                 <a:latin typeface="Montserrat Light" panose="00000400000000000000" pitchFamily="2" charset="0"/>
               </a:rPr>
-              <a:t>24.01.2025</a:t>
+              <a:t>22.02.2025</a:t>
             </a:r>
           </a:p>
         </p:txBody>
@@ -5065,10 +5113,10 @@
       </p:pic>
       <p:pic>
         <p:nvPicPr>
-          <p:cNvPr id="3" name="Grafik 2">
+          <p:cNvPr id="15" name="Grafik 14">
             <a:extLst>
               <a:ext uri="{FF2B5EF4-FFF2-40B4-BE49-F238E27FC236}">
-                <a16:creationId xmlns:a16="http://schemas.microsoft.com/office/drawing/2014/main" id="{F44F88F7-81A7-8F22-8638-21ACDF9A0CB2}"/>
+                <a16:creationId xmlns:a16="http://schemas.microsoft.com/office/drawing/2014/main" id="{CA90E277-F6CB-1BFD-13B0-04AC28A8AFC0}"/>
               </a:ext>
             </a:extLst>
           </p:cNvPr>
@@ -5085,8 +5133,8 @@
         </p:blipFill>
         <p:spPr>
           <a:xfrm>
-            <a:off x="436866" y="7548714"/>
-            <a:ext cx="5848331" cy="2357286"/>
+            <a:off x="0" y="7629806"/>
+            <a:ext cx="6858000" cy="2180376"/>
           </a:xfrm>
           <a:prstGeom prst="rect">
             <a:avLst/>
@@ -5752,6 +5800,33 @@
 </file>
 
 <file path=customXml/item1.xml><?xml version="1.0" encoding="utf-8"?>
+<?mso-contentType ?>
+<FormTemplates xmlns="http://schemas.microsoft.com/sharepoint/v3/contenttype/forms">
+  <Display>DocumentLibraryForm</Display>
+  <Edit>DocumentLibraryForm</Edit>
+  <New>DocumentLibraryForm</New>
+</FormTemplates>
+</file>
+
+<file path=customXml/item2.xml><?xml version="1.0" encoding="utf-8"?>
+<p:properties xmlns:p="http://schemas.microsoft.com/office/2006/metadata/properties" xmlns:xsi="http://www.w3.org/2001/XMLSchema-instance" xmlns:pc="http://schemas.microsoft.com/office/infopath/2007/PartnerControls">
+  <documentManagement>
+    <SharedWithUsers xmlns="97396690-0b91-46d2-ad5a-06f45914e19c">
+      <UserInfo>
+        <DisplayName/>
+        <AccountId xsi:nil="true"/>
+        <AccountType/>
+      </UserInfo>
+    </SharedWithUsers>
+    <lcf76f155ced4ddcb4097134ff3c332f xmlns="6126070c-0864-4b03-b2dc-aab5d8c39348">
+      <Terms xmlns="http://schemas.microsoft.com/office/infopath/2007/PartnerControls"/>
+    </lcf76f155ced4ddcb4097134ff3c332f>
+    <TaxCatchAll xmlns="97396690-0b91-46d2-ad5a-06f45914e19c" xsi:nil="true"/>
+  </documentManagement>
+</p:properties>
+</file>
+
+<file path=customXml/item3.xml><?xml version="1.0" encoding="utf-8"?>
 <ct:contentTypeSchema xmlns:ct="http://schemas.microsoft.com/office/2006/metadata/contentType" xmlns:ma="http://schemas.microsoft.com/office/2006/metadata/properties/metaAttributes" ct:_="" ma:_="" ma:contentTypeName="Dokument" ma:contentTypeID="0x010100044AD662EB7A25499208DD4235E5F8D6" ma:contentTypeVersion="18" ma:contentTypeDescription="Ein neues Dokument erstellen." ma:contentTypeScope="" ma:versionID="6743b63c00ca1b836503a1e7d79de5f6">
   <xsd:schema xmlns:xsd="http://www.w3.org/2001/XMLSchema" xmlns:xs="http://www.w3.org/2001/XMLSchema" xmlns:p="http://schemas.microsoft.com/office/2006/metadata/properties" xmlns:ns2="6126070c-0864-4b03-b2dc-aab5d8c39348" xmlns:ns3="97396690-0b91-46d2-ad5a-06f45914e19c" targetNamespace="http://schemas.microsoft.com/office/2006/metadata/properties" ma:root="true" ma:fieldsID="7df0be0bc9a5654e75e7c5b6be00286d" ns2:_="" ns3:_="">
     <xsd:import namespace="6126070c-0864-4b03-b2dc-aab5d8c39348"/>
@@ -6006,48 +6081,10 @@
 </ct:contentTypeSchema>
 </file>
 
-<file path=customXml/item2.xml><?xml version="1.0" encoding="utf-8"?>
-<p:properties xmlns:p="http://schemas.microsoft.com/office/2006/metadata/properties" xmlns:xsi="http://www.w3.org/2001/XMLSchema-instance" xmlns:pc="http://schemas.microsoft.com/office/infopath/2007/PartnerControls">
-  <documentManagement>
-    <SharedWithUsers xmlns="97396690-0b91-46d2-ad5a-06f45914e19c">
-      <UserInfo>
-        <DisplayName/>
-        <AccountId xsi:nil="true"/>
-        <AccountType/>
-      </UserInfo>
-    </SharedWithUsers>
-    <lcf76f155ced4ddcb4097134ff3c332f xmlns="6126070c-0864-4b03-b2dc-aab5d8c39348">
-      <Terms xmlns="http://schemas.microsoft.com/office/infopath/2007/PartnerControls"/>
-    </lcf76f155ced4ddcb4097134ff3c332f>
-    <TaxCatchAll xmlns="97396690-0b91-46d2-ad5a-06f45914e19c" xsi:nil="true"/>
-  </documentManagement>
-</p:properties>
-</file>
-
-<file path=customXml/item3.xml><?xml version="1.0" encoding="utf-8"?>
-<?mso-contentType ?>
-<FormTemplates xmlns="http://schemas.microsoft.com/sharepoint/v3/contenttype/forms">
-  <Display>DocumentLibraryForm</Display>
-  <Edit>DocumentLibraryForm</Edit>
-  <New>DocumentLibraryForm</New>
-</FormTemplates>
-</file>
-
 <file path=customXml/itemProps1.xml><?xml version="1.0" encoding="utf-8"?>
-<ds:datastoreItem xmlns:ds="http://schemas.openxmlformats.org/officeDocument/2006/customXml" ds:itemID="{3E09281D-64EC-4B41-BF41-414128D81736}">
+<ds:datastoreItem xmlns:ds="http://schemas.openxmlformats.org/officeDocument/2006/customXml" ds:itemID="{61F0326B-7C1A-45A3-8DA0-69177D7DF157}">
   <ds:schemaRefs>
-    <ds:schemaRef ds:uri="http://schemas.microsoft.com/office/2006/metadata/contentType"/>
-    <ds:schemaRef ds:uri="http://schemas.microsoft.com/office/2006/metadata/properties/metaAttributes"/>
-    <ds:schemaRef ds:uri="http://www.w3.org/2001/XMLSchema"/>
-    <ds:schemaRef ds:uri="http://schemas.microsoft.com/office/2006/metadata/properties"/>
-    <ds:schemaRef ds:uri="6126070c-0864-4b03-b2dc-aab5d8c39348"/>
-    <ds:schemaRef ds:uri="97396690-0b91-46d2-ad5a-06f45914e19c"/>
-    <ds:schemaRef ds:uri="http://schemas.microsoft.com/office/2006/documentManagement/types"/>
-    <ds:schemaRef ds:uri="http://schemas.microsoft.com/office/infopath/2007/PartnerControls"/>
-    <ds:schemaRef ds:uri="http://schemas.openxmlformats.org/package/2006/metadata/core-properties"/>
-    <ds:schemaRef ds:uri="http://purl.org/dc/elements/1.1/"/>
-    <ds:schemaRef ds:uri="http://purl.org/dc/terms/"/>
-    <ds:schemaRef ds:uri="http://schemas.microsoft.com/internal/obd"/>
+    <ds:schemaRef ds:uri="http://schemas.microsoft.com/sharepoint/v3/contenttype/forms"/>
   </ds:schemaRefs>
 </ds:datastoreItem>
 </file>
@@ -6070,9 +6107,20 @@
 </file>
 
 <file path=customXml/itemProps3.xml><?xml version="1.0" encoding="utf-8"?>
-<ds:datastoreItem xmlns:ds="http://schemas.openxmlformats.org/officeDocument/2006/customXml" ds:itemID="{61F0326B-7C1A-45A3-8DA0-69177D7DF157}">
+<ds:datastoreItem xmlns:ds="http://schemas.openxmlformats.org/officeDocument/2006/customXml" ds:itemID="{3E09281D-64EC-4B41-BF41-414128D81736}">
   <ds:schemaRefs>
-    <ds:schemaRef ds:uri="http://schemas.microsoft.com/sharepoint/v3/contenttype/forms"/>
+    <ds:schemaRef ds:uri="http://schemas.microsoft.com/office/2006/metadata/contentType"/>
+    <ds:schemaRef ds:uri="http://schemas.microsoft.com/office/2006/metadata/properties/metaAttributes"/>
+    <ds:schemaRef ds:uri="http://www.w3.org/2001/XMLSchema"/>
+    <ds:schemaRef ds:uri="http://schemas.microsoft.com/office/2006/metadata/properties"/>
+    <ds:schemaRef ds:uri="6126070c-0864-4b03-b2dc-aab5d8c39348"/>
+    <ds:schemaRef ds:uri="97396690-0b91-46d2-ad5a-06f45914e19c"/>
+    <ds:schemaRef ds:uri="http://schemas.microsoft.com/office/2006/documentManagement/types"/>
+    <ds:schemaRef ds:uri="http://schemas.microsoft.com/office/infopath/2007/PartnerControls"/>
+    <ds:schemaRef ds:uri="http://schemas.openxmlformats.org/package/2006/metadata/core-properties"/>
+    <ds:schemaRef ds:uri="http://purl.org/dc/elements/1.1/"/>
+    <ds:schemaRef ds:uri="http://purl.org/dc/terms/"/>
+    <ds:schemaRef ds:uri="http://schemas.microsoft.com/internal/obd"/>
   </ds:schemaRefs>
 </ds:datastoreItem>
 </file>

--- a/documentation/MarketingMaterial/CAMARA Onepager.pptx
+++ b/documentation/MarketingMaterial/CAMARA Onepager.pptx
@@ -21,33 +21,40 @@
       <p:boldItalic r:id="rId10"/>
     </p:embeddedFont>
     <p:embeddedFont>
-      <p:font typeface="Montserrat" panose="00000500000000000000" charset="0"/>
+      <p:font typeface="Montserrat" panose="00000500000000000000" pitchFamily="2" charset="0"/>
       <p:regular r:id="rId11"/>
       <p:bold r:id="rId12"/>
       <p:italic r:id="rId13"/>
       <p:boldItalic r:id="rId14"/>
     </p:embeddedFont>
     <p:embeddedFont>
-      <p:font typeface="Montserrat Light" panose="00000400000000000000" charset="0"/>
+      <p:font typeface="Montserrat Light" panose="00000400000000000000" pitchFamily="2" charset="0"/>
       <p:regular r:id="rId15"/>
       <p:bold r:id="rId16"/>
       <p:italic r:id="rId17"/>
       <p:boldItalic r:id="rId18"/>
     </p:embeddedFont>
     <p:embeddedFont>
-      <p:font typeface="Montserrat SemiBold" panose="00000700000000000000" charset="0"/>
+      <p:font typeface="Montserrat SemiBold" panose="00000700000000000000" pitchFamily="2" charset="0"/>
       <p:regular r:id="rId19"/>
       <p:bold r:id="rId20"/>
       <p:italic r:id="rId21"/>
       <p:boldItalic r:id="rId22"/>
     </p:embeddedFont>
     <p:embeddedFont>
+      <p:font typeface="Open Sans" panose="020B0606030504020204" pitchFamily="34" charset="0"/>
+      <p:regular r:id="rId23"/>
+      <p:bold r:id="rId24"/>
+      <p:italic r:id="rId25"/>
+      <p:boldItalic r:id="rId26"/>
+    </p:embeddedFont>
+    <p:embeddedFont>
       <p:font typeface="Wingdings 2" panose="05020102010507070707" pitchFamily="18" charset="2"/>
-      <p:regular r:id="rId23"/>
+      <p:regular r:id="rId27"/>
     </p:embeddedFont>
   </p:embeddedFontLst>
   <p:custDataLst>
-    <p:tags r:id="rId24"/>
+    <p:tags r:id="rId28"/>
   </p:custDataLst>
   <p:defaultTextStyle>
     <a:defPPr>
@@ -355,38 +362,38 @@
   <pc:docChgLst>
     <pc:chgData name="Kümmerle, Markus" userId="edb588ad-b118-44cb-93b6-335b967c9009" providerId="ADAL" clId="{686B896C-B9EC-4A9F-AB99-3B22A7E9F104}"/>
     <pc:docChg chg="custSel modSld">
-      <pc:chgData name="Kümmerle, Markus" userId="edb588ad-b118-44cb-93b6-335b967c9009" providerId="ADAL" clId="{686B896C-B9EC-4A9F-AB99-3B22A7E9F104}" dt="2025-10-28T16:56:56.384" v="272" actId="20577"/>
+      <pc:chgData name="Kümmerle, Markus" userId="edb588ad-b118-44cb-93b6-335b967c9009" providerId="ADAL" clId="{686B896C-B9EC-4A9F-AB99-3B22A7E9F104}" dt="2025-11-27T17:20:44.359" v="351" actId="20577"/>
       <pc:docMkLst>
         <pc:docMk/>
       </pc:docMkLst>
       <pc:sldChg chg="addSp delSp modSp mod">
-        <pc:chgData name="Kümmerle, Markus" userId="edb588ad-b118-44cb-93b6-335b967c9009" providerId="ADAL" clId="{686B896C-B9EC-4A9F-AB99-3B22A7E9F104}" dt="2025-10-28T16:56:56.384" v="272" actId="20577"/>
+        <pc:chgData name="Kümmerle, Markus" userId="edb588ad-b118-44cb-93b6-335b967c9009" providerId="ADAL" clId="{686B896C-B9EC-4A9F-AB99-3B22A7E9F104}" dt="2025-11-27T17:20:44.359" v="351" actId="20577"/>
         <pc:sldMkLst>
           <pc:docMk/>
           <pc:sldMk cId="753175953" sldId="2056"/>
         </pc:sldMkLst>
         <pc:spChg chg="mod">
-          <ac:chgData name="Kümmerle, Markus" userId="edb588ad-b118-44cb-93b6-335b967c9009" providerId="ADAL" clId="{686B896C-B9EC-4A9F-AB99-3B22A7E9F104}" dt="2025-10-28T16:56:56.384" v="272" actId="20577"/>
+          <ac:chgData name="Kümmerle, Markus" userId="edb588ad-b118-44cb-93b6-335b967c9009" providerId="ADAL" clId="{686B896C-B9EC-4A9F-AB99-3B22A7E9F104}" dt="2025-11-27T17:20:44.359" v="351" actId="20577"/>
           <ac:spMkLst>
             <pc:docMk/>
             <pc:sldMk cId="753175953" sldId="2056"/>
             <ac:spMk id="12" creationId="{70463976-1354-BDDA-18A9-EEFA0BB1625A}"/>
           </ac:spMkLst>
         </pc:spChg>
-        <pc:picChg chg="add mod">
-          <ac:chgData name="Kümmerle, Markus" userId="edb588ad-b118-44cb-93b6-335b967c9009" providerId="ADAL" clId="{686B896C-B9EC-4A9F-AB99-3B22A7E9F104}" dt="2025-10-28T16:22:19.431" v="268" actId="14100"/>
+        <pc:picChg chg="add del mod">
+          <ac:chgData name="Kümmerle, Markus" userId="edb588ad-b118-44cb-93b6-335b967c9009" providerId="ADAL" clId="{686B896C-B9EC-4A9F-AB99-3B22A7E9F104}" dt="2025-11-27T17:19:37.219" v="274" actId="478"/>
           <ac:picMkLst>
             <pc:docMk/>
             <pc:sldMk cId="753175953" sldId="2056"/>
             <ac:picMk id="3" creationId="{1679701D-E316-649F-0951-17E824D1E138}"/>
           </ac:picMkLst>
         </pc:picChg>
-        <pc:picChg chg="add del mod">
-          <ac:chgData name="Kümmerle, Markus" userId="edb588ad-b118-44cb-93b6-335b967c9009" providerId="ADAL" clId="{686B896C-B9EC-4A9F-AB99-3B22A7E9F104}" dt="2025-10-28T16:21:51.579" v="255" actId="478"/>
+        <pc:picChg chg="add mod">
+          <ac:chgData name="Kümmerle, Markus" userId="edb588ad-b118-44cb-93b6-335b967c9009" providerId="ADAL" clId="{686B896C-B9EC-4A9F-AB99-3B22A7E9F104}" dt="2025-11-27T17:20:27.503" v="346" actId="1037"/>
           <ac:picMkLst>
             <pc:docMk/>
             <pc:sldMk cId="753175953" sldId="2056"/>
-            <ac:picMk id="4" creationId="{ABC7A9B6-EE31-3CF8-766F-57BA51C7749B}"/>
+            <ac:picMk id="4" creationId="{2547B71C-1807-44A0-1DDA-CF857EA053F6}"/>
           </ac:picMkLst>
         </pc:picChg>
       </pc:sldChg>
@@ -510,7 +517,7 @@
             <a:fld id="{9847C1C0-7CF7-4E43-8415-72BC7E37BCB3}" type="datetimeFigureOut">
               <a:rPr lang="de-DE" smtClean="0"/>
               <a:pPr/>
-              <a:t>28.10.2025</a:t>
+              <a:t>27.11.2025</a:t>
             </a:fld>
             <a:endParaRPr lang="de-DE"/>
           </a:p>
@@ -4793,7 +4800,7 @@
         <p:spPr>
           <a:xfrm>
             <a:off x="370278" y="251736"/>
-            <a:ext cx="704039" cy="215444"/>
+            <a:ext cx="657552" cy="215444"/>
           </a:xfrm>
           <a:prstGeom prst="rect">
             <a:avLst/>
@@ -4810,7 +4817,7 @@
               <a:rPr lang="de-DE" sz="800" dirty="0">
                 <a:latin typeface="Montserrat Light" panose="00000400000000000000" pitchFamily="2" charset="0"/>
               </a:rPr>
-              <a:t>28.10.2025</a:t>
+              <a:t>27.11.2025</a:t>
             </a:r>
           </a:p>
         </p:txBody>
@@ -4882,10 +4889,10 @@
       </p:pic>
       <p:pic>
         <p:nvPicPr>
-          <p:cNvPr id="3" name="Grafik 2">
+          <p:cNvPr id="4" name="Grafik 3">
             <a:extLst>
               <a:ext uri="{FF2B5EF4-FFF2-40B4-BE49-F238E27FC236}">
-                <a16:creationId xmlns:a16="http://schemas.microsoft.com/office/drawing/2014/main" id="{1679701D-E316-649F-0951-17E824D1E138}"/>
+                <a16:creationId xmlns:a16="http://schemas.microsoft.com/office/drawing/2014/main" id="{2547B71C-1807-44A0-1DDA-CF857EA053F6}"/>
               </a:ext>
             </a:extLst>
           </p:cNvPr>
@@ -4902,8 +4909,8 @@
         </p:blipFill>
         <p:spPr>
           <a:xfrm>
-            <a:off x="0" y="7568861"/>
-            <a:ext cx="6858000" cy="2337139"/>
+            <a:off x="-5610" y="7567641"/>
+            <a:ext cx="6858000" cy="2329784"/>
           </a:xfrm>
           <a:prstGeom prst="rect">
             <a:avLst/>
@@ -5569,8 +5576,26 @@
 </file>
 
 <file path=customXml/item1.xml><?xml version="1.0" encoding="utf-8"?>
-<ct:contentTypeSchema xmlns:ct="http://schemas.microsoft.com/office/2006/metadata/contentType" xmlns:ma="http://schemas.microsoft.com/office/2006/metadata/properties/metaAttributes" ct:_="" ma:_="" ma:contentTypeName="Dokument" ma:contentTypeID="0x010100044AD662EB7A25499208DD4235E5F8D6" ma:contentTypeVersion="19" ma:contentTypeDescription="Ein neues Dokument erstellen." ma:contentTypeScope="" ma:versionID="6dd0f8c0eace48ff92b5c75a0371321e">
-  <xsd:schema xmlns:xsd="http://www.w3.org/2001/XMLSchema" xmlns:xs="http://www.w3.org/2001/XMLSchema" xmlns:p="http://schemas.microsoft.com/office/2006/metadata/properties" xmlns:ns2="6126070c-0864-4b03-b2dc-aab5d8c39348" xmlns:ns3="97396690-0b91-46d2-ad5a-06f45914e19c" targetNamespace="http://schemas.microsoft.com/office/2006/metadata/properties" ma:root="true" ma:fieldsID="8db16611652685d20b4d4e85d0b84546" ns2:_="" ns3:_="">
+<p:properties xmlns:p="http://schemas.microsoft.com/office/2006/metadata/properties" xmlns:xsi="http://www.w3.org/2001/XMLSchema-instance" xmlns:pc="http://schemas.microsoft.com/office/infopath/2007/PartnerControls">
+  <documentManagement>
+    <SharedWithUsers xmlns="97396690-0b91-46d2-ad5a-06f45914e19c">
+      <UserInfo>
+        <DisplayName/>
+        <AccountId xsi:nil="true"/>
+        <AccountType/>
+      </UserInfo>
+    </SharedWithUsers>
+    <lcf76f155ced4ddcb4097134ff3c332f xmlns="6126070c-0864-4b03-b2dc-aab5d8c39348">
+      <Terms xmlns="http://schemas.microsoft.com/office/infopath/2007/PartnerControls"/>
+    </lcf76f155ced4ddcb4097134ff3c332f>
+    <TaxCatchAll xmlns="97396690-0b91-46d2-ad5a-06f45914e19c" xsi:nil="true"/>
+  </documentManagement>
+</p:properties>
+</file>
+
+<file path=customXml/item2.xml><?xml version="1.0" encoding="utf-8"?>
+<ct:contentTypeSchema xmlns:ct="http://schemas.microsoft.com/office/2006/metadata/contentType" xmlns:ma="http://schemas.microsoft.com/office/2006/metadata/properties/metaAttributes" ct:_="" ma:_="" ma:contentTypeName="Dokument" ma:contentTypeID="0x010100044AD662EB7A25499208DD4235E5F8D6" ma:contentTypeVersion="19" ma:contentTypeDescription="Ein neues Dokument erstellen." ma:contentTypeScope="" ma:versionID="d44e70eff341f7f71d59fdab5f8c1d8c">
+  <xsd:schema xmlns:xsd="http://www.w3.org/2001/XMLSchema" xmlns:xs="http://www.w3.org/2001/XMLSchema" xmlns:p="http://schemas.microsoft.com/office/2006/metadata/properties" xmlns:ns2="6126070c-0864-4b03-b2dc-aab5d8c39348" xmlns:ns3="97396690-0b91-46d2-ad5a-06f45914e19c" targetNamespace="http://schemas.microsoft.com/office/2006/metadata/properties" ma:root="true" ma:fieldsID="fe175ce22c645d17e43c333049234c1e" ns2:_="" ns3:_="">
     <xsd:import namespace="6126070c-0864-4b03-b2dc-aab5d8c39348"/>
     <xsd:import namespace="97396690-0b91-46d2-ad5a-06f45914e19c"/>
     <xsd:element name="properties">
@@ -5829,24 +5854,6 @@
 </ct:contentTypeSchema>
 </file>
 
-<file path=customXml/item2.xml><?xml version="1.0" encoding="utf-8"?>
-<p:properties xmlns:p="http://schemas.microsoft.com/office/2006/metadata/properties" xmlns:xsi="http://www.w3.org/2001/XMLSchema-instance" xmlns:pc="http://schemas.microsoft.com/office/infopath/2007/PartnerControls">
-  <documentManagement>
-    <SharedWithUsers xmlns="97396690-0b91-46d2-ad5a-06f45914e19c">
-      <UserInfo>
-        <DisplayName/>
-        <AccountId xsi:nil="true"/>
-        <AccountType/>
-      </UserInfo>
-    </SharedWithUsers>
-    <lcf76f155ced4ddcb4097134ff3c332f xmlns="6126070c-0864-4b03-b2dc-aab5d8c39348">
-      <Terms xmlns="http://schemas.microsoft.com/office/infopath/2007/PartnerControls"/>
-    </lcf76f155ced4ddcb4097134ff3c332f>
-    <TaxCatchAll xmlns="97396690-0b91-46d2-ad5a-06f45914e19c" xsi:nil="true"/>
-  </documentManagement>
-</p:properties>
-</file>
-
 <file path=customXml/item3.xml><?xml version="1.0" encoding="utf-8"?>
 <?mso-contentType ?>
 <FormTemplates xmlns="http://schemas.microsoft.com/sharepoint/v3/contenttype/forms">
@@ -5857,10 +5864,6 @@
 </file>
 
 <file path=customXml/itemProps1.xml><?xml version="1.0" encoding="utf-8"?>
-<ds:datastoreItem xmlns:ds="http://schemas.openxmlformats.org/officeDocument/2006/customXml" ds:itemID="{89E73DBE-F142-4A11-952A-D52070C3BA8E}"/>
-</file>
-
-<file path=customXml/itemProps2.xml><?xml version="1.0" encoding="utf-8"?>
 <ds:datastoreItem xmlns:ds="http://schemas.openxmlformats.org/officeDocument/2006/customXml" ds:itemID="{96FB6EF1-0BB7-4926-9DDA-55BF1304A87D}">
   <ds:schemaRefs>
     <ds:schemaRef ds:uri="http://purl.org/dc/elements/1.1/"/>
@@ -5877,6 +5880,10 @@
 </ds:datastoreItem>
 </file>
 
+<file path=customXml/itemProps2.xml><?xml version="1.0" encoding="utf-8"?>
+<ds:datastoreItem xmlns:ds="http://schemas.openxmlformats.org/officeDocument/2006/customXml" ds:itemID="{B8747E51-E415-4E4E-ADAE-3CC08580B248}"/>
+</file>
+
 <file path=customXml/itemProps3.xml><?xml version="1.0" encoding="utf-8"?>
 <ds:datastoreItem xmlns:ds="http://schemas.openxmlformats.org/officeDocument/2006/customXml" ds:itemID="{61F0326B-7C1A-45A3-8DA0-69177D7DF157}">
   <ds:schemaRefs>
